--- a/curso/pptx/S13.pptx
+++ b/curso/pptx/S13.pptx
@@ -4817,7 +4817,7 @@
                 </a:solidFill>
                 <a:latin typeface="Nunito Sans"/>
               </a:rPr>
-              <a:t>Una falacia puede tener una </a:t>
+              <a:t>谬误可以有一个</a:t>
             </a:r>
             <a:r>
               <a:rPr sz="2800" b="1">
@@ -4826,7 +4826,7 @@
                 </a:solidFill>
                 <a:latin typeface="Nunito Sans"/>
               </a:rPr>
-              <a:t>conclusión verdadera</a:t>
+              <a:t>真的结论</a:t>
             </a:r>
             <a:r>
               <a:rPr sz="2800" b="0">
@@ -4835,7 +4835,7 @@
                 </a:solidFill>
                 <a:latin typeface="Nunito Sans"/>
               </a:rPr>
-              <a:t>: falla el camino, no el final.</a:t>
+              <a:t>：错的是过程，不是结果。</a:t>
             </a:r>
           </a:p>
           <a:p>
@@ -4860,7 +4860,7 @@
                 </a:solidFill>
                 <a:latin typeface="Nunito Sans"/>
               </a:rPr>
-              <a:t>Una frase falsa no es una falacia: es solo un error.</a:t>
+              <a:t>一句假话不是谬误：它只是一个错误。</a:t>
             </a:r>
           </a:p>
           <a:p>
@@ -4885,7 +4885,7 @@
                 </a:solidFill>
                 <a:latin typeface="Nunito Sans"/>
               </a:rPr>
-              <a:t>En esta unidad: falacias que </a:t>
+              <a:t>这个单元讲的是</a:t>
             </a:r>
             <a:r>
               <a:rPr sz="2800" b="1">
@@ -4894,7 +4894,7 @@
                 </a:solidFill>
                 <a:latin typeface="Nunito Sans"/>
               </a:rPr>
-              <a:t>atacan</a:t>
+              <a:t>攻击</a:t>
             </a:r>
             <a:r>
               <a:rPr sz="2800" b="0">
@@ -4903,7 +4903,7 @@
                 </a:solidFill>
                 <a:latin typeface="Nunito Sans"/>
               </a:rPr>
-              <a:t>, </a:t>
+              <a:t>、</a:t>
             </a:r>
             <a:r>
               <a:rPr sz="2800" b="1">
@@ -4912,7 +4912,7 @@
                 </a:solidFill>
                 <a:latin typeface="Nunito Sans"/>
               </a:rPr>
-              <a:t>desvían</a:t>
+              <a:t>转移</a:t>
             </a:r>
             <a:r>
               <a:rPr sz="2800" b="0">
@@ -4921,7 +4921,7 @@
                 </a:solidFill>
                 <a:latin typeface="Nunito Sans"/>
               </a:rPr>
-              <a:t> o </a:t>
+              <a:t>或</a:t>
             </a:r>
             <a:r>
               <a:rPr sz="2800" b="1">
@@ -4930,7 +4930,7 @@
                 </a:solidFill>
                 <a:latin typeface="Nunito Sans"/>
               </a:rPr>
-              <a:t>emocionan</a:t>
+              <a:t>煽动</a:t>
             </a:r>
             <a:r>
               <a:rPr sz="2800" b="0">
@@ -4939,7 +4939,7 @@
                 </a:solidFill>
                 <a:latin typeface="Nunito Sans"/>
               </a:rPr>
-              <a:t>.</a:t>
+              <a:t>的谬误。</a:t>
             </a:r>
           </a:p>
         </p:txBody>
@@ -7058,7 +7058,7 @@
                 </a:solidFill>
                 <a:latin typeface="Nunito Sans"/>
               </a:rPr>
-              <a:t>Puede ser un </a:t>
+              <a:t>可能是用来骗人的</a:t>
             </a:r>
             <a:r>
               <a:rPr sz="2800" b="1">
@@ -7067,7 +7067,7 @@
                 </a:solidFill>
                 <a:latin typeface="Nunito Sans"/>
               </a:rPr>
-              <a:t>truco</a:t>
+              <a:t>花招</a:t>
             </a:r>
             <a:r>
               <a:rPr sz="2800" b="0">
@@ -7076,7 +7076,7 @@
                 </a:solidFill>
                 <a:latin typeface="Nunito Sans"/>
               </a:rPr>
-              <a:t> para engañar…</a:t>
+              <a:t>……</a:t>
             </a:r>
           </a:p>
           <a:p>
@@ -7101,7 +7101,7 @@
                 </a:solidFill>
                 <a:latin typeface="Nunito Sans"/>
               </a:rPr>
-              <a:t>… o un error que cometemos sin darnos cuenta</a:t>
+              <a:t>……也可能是我们没有察觉就犯的错误</a:t>
             </a:r>
           </a:p>
           <a:p>
@@ -7126,7 +7126,7 @@
                 </a:solidFill>
                 <a:latin typeface="Nunito Sans"/>
               </a:rPr>
-              <a:t>Las más frecuentes tienen </a:t>
+              <a:t>最常见的那些都有</a:t>
             </a:r>
             <a:r>
               <a:rPr sz="2800" b="1">
@@ -7135,7 +7135,7 @@
                 </a:solidFill>
                 <a:latin typeface="Nunito Sans"/>
               </a:rPr>
-              <a:t>nombre</a:t>
+              <a:t>名字</a:t>
             </a:r>
           </a:p>
         </p:txBody>
@@ -7683,7 +7683,7 @@
                 </a:solidFill>
                 <a:latin typeface="Nunito Sans"/>
               </a:rPr>
-              <a:t>Una opinión con la que no estoy de acuerdo</a:t>
+              <a:t>一个我不同意的观点</a:t>
             </a:r>
           </a:p>
           <a:p>
@@ -7708,7 +7708,7 @@
                 </a:solidFill>
                 <a:latin typeface="Nunito Sans"/>
               </a:rPr>
-              <a:t>Una frase falsa, sin más</a:t>
+              <a:t>单纯一句假话</a:t>
             </a:r>
           </a:p>
           <a:p>
@@ -7733,7 +7733,7 @@
                 </a:solidFill>
                 <a:latin typeface="Nunito Sans"/>
               </a:rPr>
-              <a:t>Cualquier argumento que no me convence</a:t>
+              <a:t>任何没能说服我的论证</a:t>
             </a:r>
           </a:p>
         </p:txBody>
@@ -7863,7 +7863,7 @@
                 </a:solidFill>
                 <a:latin typeface="Nunito Sans"/>
               </a:rPr>
-              <a:t>Un argumento con un fallo escondido</a:t>
+              <a:t>一个藏着缺陷的论证</a:t>
             </a:r>
           </a:p>
           <a:p>
@@ -7888,7 +7888,7 @@
                 </a:solidFill>
                 <a:latin typeface="Nunito Sans"/>
               </a:rPr>
-              <a:t>Unas razones que no llevan a la conclusión</a:t>
+              <a:t>一些得不出结论的理由</a:t>
             </a:r>
           </a:p>
           <a:p>
@@ -7913,7 +7913,7 @@
                 </a:solidFill>
                 <a:latin typeface="Nunito Sans"/>
               </a:rPr>
-              <a:t>Un truco que se puede nombrar y desmontar</a:t>
+              <a:t>一个可以说出名字、可以拆穿的花招</a:t>
             </a:r>
           </a:p>
         </p:txBody>

--- a/curso/pptx/S13.pptx
+++ b/curso/pptx/S13.pptx
@@ -4438,7 +4438,7 @@
                 </a:solidFill>
                 <a:latin typeface="Nunito Sans"/>
               </a:rPr>
-              <a:t>奈亚拉：“我今天带伞，因为天气应用显示降雨概率 90%，而且天很黑。”</a:t>
+              <a:t>一个女孩：“我今天带伞，因为天气应用显示降雨概率 90%，而且天很黑。”</a:t>
             </a:r>
           </a:p>
         </p:txBody>
@@ -5125,7 +5125,7 @@
                 </a:solidFill>
                 <a:latin typeface="Nunito Sans"/>
               </a:rPr>
-              <a:t>艾托：“吸烟对健康有害。我知道，因为我最喜欢的游戏博主这么说。”</a:t>
+              <a:t>一个男孩：“吸烟对健康有害。我知道，因为我最喜欢的游戏博主这么说。”</a:t>
             </a:r>
           </a:p>
         </p:txBody>
